--- a/WeeK1_Practicum_Presentation.pptx
+++ b/WeeK1_Practicum_Presentation.pptx
@@ -14455,10 +14455,15 @@
             <a:r>
               <a:rPr lang="en-US" sz="2400" b="1" dirty="0">
                 <a:latin typeface="Arial" panose="020B0604020202020204" pitchFamily="34" charset="0"/>
+                <a:ea typeface="Calibri" pitchFamily="34" charset="-122"/>
                 <a:cs typeface="Arial" panose="020B0604020202020204" pitchFamily="34" charset="0"/>
               </a:rPr>
-              <a:t>Data Science Practicum I</a:t>
+              <a:t>Loan Approval Prediction</a:t>
             </a:r>
+            <a:endParaRPr lang="en-US" sz="2400" b="1" u="sng" dirty="0">
+              <a:latin typeface="Arial" panose="020B0604020202020204" pitchFamily="34" charset="0"/>
+              <a:cs typeface="Arial" panose="020B0604020202020204" pitchFamily="34" charset="0"/>
+            </a:endParaRPr>
           </a:p>
           <a:p>
             <a:pPr marL="457200" algn="ctr">
@@ -14501,10 +14506,6 @@
               </a:rPr>
               <a:t>MSDS692_S40_Data Science Practicum</a:t>
             </a:r>
-            <a:endParaRPr lang="en-US" sz="2400" b="1" u="sng" dirty="0">
-              <a:latin typeface="Arial" panose="020B0604020202020204" pitchFamily="34" charset="0"/>
-              <a:cs typeface="Arial" panose="020B0604020202020204" pitchFamily="34" charset="0"/>
-            </a:endParaRPr>
           </a:p>
           <a:p>
             <a:pPr marL="457200" algn="ctr">
